--- a/docs/pitch-decks/design-partner/pptx/55-air-gapped-deploy.pptx
+++ b/docs/pitch-decks/design-partner/pptx/55-air-gapped-deploy.pptx
@@ -1765,7 +1765,7 @@
                   <a:srgbClr val="8B8FA3"/>
                 </a:solidFill>
               </a:rPr>
-              <a:t>Clinical decision support with HIPAA-compliant audit trails</a:t>
+              <a:t>Collaborative pilot for Air-Gapped Deployment with replayable decision evidence</a:t>
             </a:r>
             <a:endParaRPr lang="en-US" sz="1200" dirty="0"/>
           </a:p>
@@ -1995,7 +1995,7 @@
                   <a:srgbClr val="FFFFFF"/>
                 </a:solidFill>
               </a:rPr>
-              <a:t>"Air-Gapped Deployment AI has no accountability layer. Clinical decisions need explainable, auditable AI — with patient safety as the prime directive."</a:t>
+              <a:t>"Air-Gapped Deployment reveals whether an AI workflow is governed or merely automated. High-stakes teams need challenge, evidence, and replay before rollout."</a:t>
             </a:r>
             <a:endParaRPr lang="en-US" sz="2200" dirty="0"/>
           </a:p>
@@ -2715,7 +2715,7 @@
                   <a:srgbClr val="8B8FA3"/>
                 </a:solidFill>
               </a:rPr>
-              <a:t>Clinical systems integration and health informatics</a:t>
+              <a:t>Air-Gapped Deployment workflows with full decision evidence</a:t>
             </a:r>
             <a:endParaRPr lang="en-US" sz="1200" dirty="0"/>
           </a:p>
@@ -2733,7 +2733,7 @@
                   <a:srgbClr val="8B8FA3"/>
                 </a:solidFill>
               </a:rPr>
-              <a:t>Safety metrics, adverse event prevention</a:t>
+              <a:t>Human-in-the-loop approvals and preserved dissent</a:t>
             </a:r>
             <a:endParaRPr lang="en-US" sz="1200" dirty="0"/>
           </a:p>
@@ -2751,7 +2751,7 @@
                   <a:srgbClr val="8B8FA3"/>
                 </a:solidFill>
               </a:rPr>
-              <a:t>HIPAA, FDA, CMS regulatory compliance</a:t>
+              <a:t>Exportable decision packets for audit, security, and leadership</a:t>
             </a:r>
             <a:endParaRPr lang="en-US" sz="1200" dirty="0"/>
           </a:p>
@@ -3039,7 +3039,7 @@
                   <a:srgbClr val="8B8FA3"/>
                 </a:solidFill>
               </a:rPr>
-              <a:t>Clinical protocol review — Multi-agent evaluation against safety, regulatory, and financial criteria</a:t>
+              <a:t>Air-Gapped Deployment pilot using live scenarios and approval chains</a:t>
             </a:r>
             <a:endParaRPr lang="en-US" sz="1200" dirty="0"/>
           </a:p>
@@ -3057,7 +3057,7 @@
                   <a:srgbClr val="8B8FA3"/>
                 </a:solidFill>
               </a:rPr>
-              <a:t>Hospital M&amp;A due diligence — Clinical outcomes, compliance, financial health analysis</a:t>
+              <a:t>Exception handling and escalation design with traceable outcomes</a:t>
             </a:r>
             <a:endParaRPr lang="en-US" sz="1200" dirty="0"/>
           </a:p>
@@ -3075,7 +3075,7 @@
                   <a:srgbClr val="8B8FA3"/>
                 </a:solidFill>
               </a:rPr>
-              <a:t>Regulatory change impact — CMS/FDA guidance mapped across operations</a:t>
+              <a:t>Decision packet exports for board, regulator, or customer review</a:t>
             </a:r>
             <a:endParaRPr lang="en-US" sz="1200" dirty="0"/>
           </a:p>
@@ -3093,7 +3093,7 @@
                   <a:srgbClr val="8B8FA3"/>
                 </a:solidFill>
               </a:rPr>
-              <a:t>Patient safety incident review — Full decision replay with evidence preservation</a:t>
+              <a:t>Role-based review with replay for every material decision</a:t>
             </a:r>
             <a:endParaRPr lang="en-US" sz="1200" dirty="0"/>
           </a:p>
@@ -3111,7 +3111,7 @@
                   <a:srgbClr val="8B8FA3"/>
                 </a:solidFill>
               </a:rPr>
-              <a:t>Value-based care optimization — Balance quality, outcomes, and financial sustainability</a:t>
+              <a:t>Roadmap feedback folded directly into product development</a:t>
             </a:r>
             <a:endParaRPr lang="en-US" sz="1200" dirty="0"/>
           </a:p>
